--- a/docs/Apresentacao_Navegacao_Autonoma.pptx
+++ b/docs/Apresentacao_Navegacao_Autonoma.pptx
@@ -17,6 +17,8 @@
     <p:sldId id="265" r:id="rId16"/>
     <p:sldId id="266" r:id="rId17"/>
     <p:sldId id="267" r:id="rId18"/>
+    <p:sldId id="268" r:id="rId19"/>
+    <p:sldId id="269" r:id="rId20"/>
   </p:sldIdLst>
   <p:sldSz cx="12191695" cy="6858000" type="screen4x3"/>
   <p:notesSz cx="6858000" cy="9144000"/>
@@ -3450,7 +3452,7 @@
                 </a:solidFill>
                 <a:latin typeface="Calibri"/>
               </a:rPr>
-              <a:t>ENGENHARIA</a:t>
+              <a:t>ROBUSTEZ</a:t>
             </a:r>
           </a:p>
           <a:p>
@@ -3469,7 +3471,7 @@
                 </a:solidFill>
                 <a:latin typeface="Cambria"/>
               </a:rPr>
-              <a:t>Organização do projeto</a:t>
+              <a:t>Passagens apertadas e goals junto a paredes</a:t>
             </a:r>
           </a:p>
         </p:txBody>
@@ -3483,7 +3485,7 @@
         <p:spPr>
           <a:xfrm>
             <a:off x="640080" y="1965960"/>
-            <a:ext cx="10881360" cy="786384"/>
+            <a:ext cx="5349240" cy="1920240"/>
           </a:xfrm>
           <a:prstGeom prst="roundRect">
             <a:avLst/>
@@ -3491,10 +3493,8 @@
           <a:solidFill>
             <a:srgbClr val="EEF3F7"/>
           </a:solidFill>
-          <a:ln w="12700">
-            <a:solidFill>
-              <a:srgbClr val="D0DEE8"/>
-            </a:solidFill>
+          <a:ln>
+            <a:noFill/>
           </a:ln>
           <a:effectLst/>
         </p:spPr>
@@ -3528,8 +3528,8 @@
         </p:nvSpPr>
         <p:spPr>
           <a:xfrm>
-            <a:off x="868680" y="2093976"/>
-            <a:ext cx="4023360" cy="548640"/>
+            <a:off x="914400" y="2194560"/>
+            <a:ext cx="4800600" cy="1554480"/>
           </a:xfrm>
           <a:prstGeom prst="rect">
             <a:avLst/>
@@ -3547,84 +3547,59 @@
                 <a:spcPts val="0"/>
               </a:spcBef>
               <a:spcAft>
-                <a:spcPts val="600"/>
-              </a:spcAft>
-            </a:pPr>
-            <a:r>
-              <a:rPr sz="1500" b="1" i="0">
+                <a:spcPts val="500"/>
+              </a:spcAft>
+            </a:pPr>
+            <a:r>
+              <a:rPr sz="1700" b="1" i="0">
                 <a:solidFill>
                   <a:srgbClr val="065A82"/>
                 </a:solidFill>
-                <a:latin typeface="Consolas"/>
-              </a:rPr>
-              <a:t>main.py</a:t>
-            </a:r>
-          </a:p>
-        </p:txBody>
-      </p:sp>
-      <p:sp>
-        <p:nvSpPr>
-          <p:cNvPr id="6" name="TextBox 5"/>
-          <p:cNvSpPr txBox="1"/>
-          <p:nvPr/>
-        </p:nvSpPr>
-        <p:spPr>
-          <a:xfrm>
-            <a:off x="5029200" y="2093976"/>
-            <a:ext cx="6309360" cy="548640"/>
-          </a:xfrm>
-          <a:prstGeom prst="rect">
-            <a:avLst/>
-          </a:prstGeom>
-          <a:noFill/>
-        </p:spPr>
-        <p:txBody>
-          <a:bodyPr wrap="square" lIns="25400" rIns="25400" tIns="25400" bIns="25400">
-            <a:spAutoFit/>
-          </a:bodyPr>
-          <a:lstStyle/>
-          <a:p>
-            <a:pPr algn="l">
-              <a:spcBef>
-                <a:spcPts val="0"/>
-              </a:spcBef>
-              <a:spcAft>
-                <a:spcPts val="600"/>
-              </a:spcAft>
-            </a:pPr>
-            <a:r>
-              <a:rPr sz="1400" b="0" i="0">
-                <a:solidFill>
-                  <a:srgbClr val="222A33"/>
-                </a:solidFill>
                 <a:latin typeface="Calibri"/>
               </a:rPr>
-              <a:t>Loop principal: init, grade de ocupação, A*+DWA, atuação</a:t>
-            </a:r>
-          </a:p>
-        </p:txBody>
-      </p:sp>
-      <p:sp>
-        <p:nvSpPr>
-          <p:cNvPr id="7" name="Rounded Rectangle 6"/>
+              <a:t>Penalidade de proximidade (A*)</a:t>
+            </a:r>
+          </a:p>
+          <a:p>
+            <a:pPr algn="l">
+              <a:spcBef>
+                <a:spcPts val="0"/>
+              </a:spcBef>
+              <a:spcAft>
+                <a:spcPts val="0"/>
+              </a:spcAft>
+            </a:pPr>
+            <a:r>
+              <a:rPr sz="1350" b="0" i="0">
+                <a:solidFill>
+                  <a:srgbClr val="5A6672"/>
+                </a:solidFill>
+                <a:latin typeface="Calibri"/>
+              </a:rPr>
+              <a:t>Células perto de parede custam mais (estilo costmap): corredores largos vencem vãos apertados.</a:t>
+            </a:r>
+          </a:p>
+        </p:txBody>
+      </p:sp>
+      <p:sp>
+        <p:nvSpPr>
+          <p:cNvPr id="6" name="Rounded Rectangle 5"/>
           <p:cNvSpPr/>
           <p:nvPr/>
         </p:nvSpPr>
         <p:spPr>
           <a:xfrm>
-            <a:off x="640080" y="2862072"/>
-            <a:ext cx="10881360" cy="786384"/>
+            <a:off x="6172200" y="1965960"/>
+            <a:ext cx="5349240" cy="1920240"/>
           </a:xfrm>
           <a:prstGeom prst="roundRect">
             <a:avLst/>
           </a:prstGeom>
           <a:solidFill>
-            <a:srgbClr val="FFFFFF"/>
+            <a:srgbClr val="EEF3F7"/>
           </a:solidFill>
-          <a:ln w="12700">
-            <a:solidFill>
-              <a:srgbClr val="D0DEE8"/>
-            </a:solidFill>
+          <a:ln>
+            <a:noFill/>
           </a:ln>
           <a:effectLst/>
         </p:spPr>
@@ -3652,14 +3627,14 @@
       </p:sp>
       <p:sp>
         <p:nvSpPr>
-          <p:cNvPr id="8" name="TextBox 7"/>
+          <p:cNvPr id="7" name="TextBox 6"/>
           <p:cNvSpPr txBox="1"/>
           <p:nvPr/>
         </p:nvSpPr>
         <p:spPr>
           <a:xfrm>
-            <a:off x="868680" y="2990088"/>
-            <a:ext cx="4023360" cy="548640"/>
+            <a:off x="6446520" y="2194560"/>
+            <a:ext cx="4800600" cy="1554480"/>
           </a:xfrm>
           <a:prstGeom prst="rect">
             <a:avLst/>
@@ -3677,73 +3652,50 @@
                 <a:spcPts val="0"/>
               </a:spcBef>
               <a:spcAft>
-                <a:spcPts val="600"/>
-              </a:spcAft>
-            </a:pPr>
-            <a:r>
-              <a:rPr sz="1500" b="1" i="0">
+                <a:spcPts val="500"/>
+              </a:spcAft>
+            </a:pPr>
+            <a:r>
+              <a:rPr sz="1700" b="1" i="0">
                 <a:solidFill>
                   <a:srgbClr val="065A82"/>
                 </a:solidFill>
-                <a:latin typeface="Consolas"/>
-              </a:rPr>
-              <a:t>dynamic_window_approach.py</a:t>
-            </a:r>
-          </a:p>
-        </p:txBody>
-      </p:sp>
-      <p:sp>
-        <p:nvSpPr>
-          <p:cNvPr id="9" name="TextBox 8"/>
-          <p:cNvSpPr txBox="1"/>
-          <p:nvPr/>
-        </p:nvSpPr>
-        <p:spPr>
-          <a:xfrm>
-            <a:off x="5029200" y="2990088"/>
-            <a:ext cx="6309360" cy="548640"/>
-          </a:xfrm>
-          <a:prstGeom prst="rect">
-            <a:avLst/>
-          </a:prstGeom>
-          <a:noFill/>
-        </p:spPr>
-        <p:txBody>
-          <a:bodyPr wrap="square" lIns="25400" rIns="25400" tIns="25400" bIns="25400">
-            <a:spAutoFit/>
-          </a:bodyPr>
-          <a:lstStyle/>
-          <a:p>
-            <a:pPr algn="l">
-              <a:spcBef>
-                <a:spcPts val="0"/>
-              </a:spcBef>
-              <a:spcAft>
-                <a:spcPts val="600"/>
-              </a:spcAft>
-            </a:pPr>
-            <a:r>
-              <a:rPr sz="1400" b="0" i="0">
-                <a:solidFill>
-                  <a:srgbClr val="222A33"/>
-                </a:solidFill>
                 <a:latin typeface="Calibri"/>
               </a:rPr>
-              <a:t>A* melhorado (peso, pontos-chave, Bézier) + DWAController</a:t>
-            </a:r>
-          </a:p>
-        </p:txBody>
-      </p:sp>
-      <p:sp>
-        <p:nvSpPr>
-          <p:cNvPr id="10" name="Rounded Rectangle 9"/>
+              <a:t>Custo limitado (DWA)</a:t>
+            </a:r>
+          </a:p>
+          <a:p>
+            <a:pPr algn="l">
+              <a:spcBef>
+                <a:spcPts val="0"/>
+              </a:spcBef>
+              <a:spcAft>
+                <a:spcPts val="0"/>
+              </a:spcAft>
+            </a:pPr>
+            <a:r>
+              <a:rPr sz="1350" b="0" i="0">
+                <a:solidFill>
+                  <a:srgbClr val="5A6672"/>
+                </a:solidFill>
+                <a:latin typeface="Calibri"/>
+              </a:rPr>
+              <a:t>1/d em vez de 1/(d−raio): o robô não congela mais na entrada de corredores estreitos.</a:t>
+            </a:r>
+          </a:p>
+        </p:txBody>
+      </p:sp>
+      <p:sp>
+        <p:nvSpPr>
+          <p:cNvPr id="8" name="Rounded Rectangle 7"/>
           <p:cNvSpPr/>
           <p:nvPr/>
         </p:nvSpPr>
         <p:spPr>
           <a:xfrm>
-            <a:off x="640080" y="3758183"/>
-            <a:ext cx="10881360" cy="786384"/>
+            <a:off x="640080" y="4069080"/>
+            <a:ext cx="5349240" cy="1920240"/>
           </a:xfrm>
           <a:prstGeom prst="roundRect">
             <a:avLst/>
@@ -3751,10 +3703,8 @@
           <a:solidFill>
             <a:srgbClr val="EEF3F7"/>
           </a:solidFill>
-          <a:ln w="12700">
-            <a:solidFill>
-              <a:srgbClr val="D0DEE8"/>
-            </a:solidFill>
+          <a:ln>
+            <a:noFill/>
           </a:ln>
           <a:effectLst/>
         </p:spPr>
@@ -3782,14 +3732,14 @@
       </p:sp>
       <p:sp>
         <p:nvSpPr>
-          <p:cNvPr id="11" name="TextBox 10"/>
+          <p:cNvPr id="9" name="TextBox 8"/>
           <p:cNvSpPr txBox="1"/>
           <p:nvPr/>
         </p:nvSpPr>
         <p:spPr>
           <a:xfrm>
-            <a:off x="868680" y="3886199"/>
-            <a:ext cx="4023360" cy="548640"/>
+            <a:off x="914400" y="4297680"/>
+            <a:ext cx="4800600" cy="1554480"/>
           </a:xfrm>
           <a:prstGeom prst="rect">
             <a:avLst/>
@@ -3807,84 +3757,59 @@
                 <a:spcPts val="0"/>
               </a:spcBef>
               <a:spcAft>
-                <a:spcPts val="600"/>
-              </a:spcAft>
-            </a:pPr>
-            <a:r>
-              <a:rPr sz="1500" b="1" i="0">
+                <a:spcPts val="500"/>
+              </a:spcAft>
+            </a:pPr>
+            <a:r>
+              <a:rPr sz="1700" b="1" i="0">
                 <a:solidFill>
                   <a:srgbClr val="065A82"/>
                 </a:solidFill>
-                <a:latin typeface="Consolas"/>
-              </a:rPr>
-              <a:t>mapa_ocupacao.py</a:t>
-            </a:r>
-          </a:p>
-        </p:txBody>
-      </p:sp>
-      <p:sp>
-        <p:nvSpPr>
-          <p:cNvPr id="12" name="TextBox 11"/>
-          <p:cNvSpPr txBox="1"/>
-          <p:nvPr/>
-        </p:nvSpPr>
-        <p:spPr>
-          <a:xfrm>
-            <a:off x="5029200" y="3886199"/>
-            <a:ext cx="6309360" cy="548640"/>
-          </a:xfrm>
-          <a:prstGeom prst="rect">
-            <a:avLst/>
-          </a:prstGeom>
-          <a:noFill/>
-        </p:spPr>
-        <p:txBody>
-          <a:bodyPr wrap="square" lIns="25400" rIns="25400" tIns="25400" bIns="25400">
-            <a:spAutoFit/>
-          </a:bodyPr>
-          <a:lstStyle/>
-          <a:p>
-            <a:pPr algn="l">
-              <a:spcBef>
-                <a:spcPts val="0"/>
-              </a:spcBef>
-              <a:spcAft>
-                <a:spcPts val="600"/>
-              </a:spcAft>
-            </a:pPr>
-            <a:r>
-              <a:rPr sz="1400" b="0" i="0">
-                <a:solidFill>
-                  <a:srgbClr val="222A33"/>
-                </a:solidFill>
                 <a:latin typeface="Calibri"/>
               </a:rPr>
-              <a:t>Sensor de visão + Mapa de Grade de Ocupação</a:t>
-            </a:r>
-          </a:p>
-        </p:txBody>
-      </p:sp>
-      <p:sp>
-        <p:nvSpPr>
-          <p:cNvPr id="13" name="Rounded Rectangle 12"/>
+              <a:t>Alvo com linha de visão</a:t>
+            </a:r>
+          </a:p>
+          <a:p>
+            <a:pPr algn="l">
+              <a:spcBef>
+                <a:spcPts val="0"/>
+              </a:spcBef>
+              <a:spcAft>
+                <a:spcPts val="0"/>
+              </a:spcAft>
+            </a:pPr>
+            <a:r>
+              <a:rPr sz="1350" b="0" i="0">
+                <a:solidFill>
+                  <a:srgbClr val="5A6672"/>
+                </a:solidFill>
+                <a:latin typeface="Calibri"/>
+              </a:rPr>
+              <a:t>O lookahead nunca mira um waypoint atrás de uma quina.</a:t>
+            </a:r>
+          </a:p>
+        </p:txBody>
+      </p:sp>
+      <p:sp>
+        <p:nvSpPr>
+          <p:cNvPr id="10" name="Rounded Rectangle 9"/>
           <p:cNvSpPr/>
           <p:nvPr/>
         </p:nvSpPr>
         <p:spPr>
           <a:xfrm>
-            <a:off x="640080" y="4654296"/>
-            <a:ext cx="10881360" cy="786384"/>
+            <a:off x="6172200" y="4069080"/>
+            <a:ext cx="5349240" cy="1920240"/>
           </a:xfrm>
           <a:prstGeom prst="roundRect">
             <a:avLst/>
           </a:prstGeom>
           <a:solidFill>
-            <a:srgbClr val="FFFFFF"/>
+            <a:srgbClr val="EEF3F7"/>
           </a:solidFill>
-          <a:ln w="12700">
-            <a:solidFill>
-              <a:srgbClr val="D0DEE8"/>
-            </a:solidFill>
+          <a:ln>
+            <a:noFill/>
           </a:ln>
           <a:effectLst/>
         </p:spPr>
@@ -3912,14 +3837,14 @@
       </p:sp>
       <p:sp>
         <p:nvSpPr>
-          <p:cNvPr id="14" name="TextBox 13"/>
+          <p:cNvPr id="11" name="TextBox 10"/>
           <p:cNvSpPr txBox="1"/>
           <p:nvPr/>
         </p:nvSpPr>
         <p:spPr>
           <a:xfrm>
-            <a:off x="868680" y="4782312"/>
-            <a:ext cx="4023360" cy="548640"/>
+            <a:off x="6446520" y="4297680"/>
+            <a:ext cx="4800600" cy="1554480"/>
           </a:xfrm>
           <a:prstGeom prst="rect">
             <a:avLst/>
@@ -3937,189 +3862,36 @@
                 <a:spcPts val="0"/>
               </a:spcBef>
               <a:spcAft>
-                <a:spcPts val="600"/>
-              </a:spcAft>
-            </a:pPr>
-            <a:r>
-              <a:rPr sz="1500" b="1" i="0">
+                <a:spcPts val="500"/>
+              </a:spcAft>
+            </a:pPr>
+            <a:r>
+              <a:rPr sz="1700" b="1" i="0">
                 <a:solidFill>
                   <a:srgbClr val="065A82"/>
                 </a:solidFill>
-                <a:latin typeface="Consolas"/>
-              </a:rPr>
-              <a:t>utils/  •  cenas/</a:t>
-            </a:r>
-          </a:p>
-        </p:txBody>
-      </p:sp>
-      <p:sp>
-        <p:nvSpPr>
-          <p:cNvPr id="15" name="TextBox 14"/>
-          <p:cNvSpPr txBox="1"/>
-          <p:nvPr/>
-        </p:nvSpPr>
-        <p:spPr>
-          <a:xfrm>
-            <a:off x="5029200" y="4782312"/>
-            <a:ext cx="6309360" cy="548640"/>
-          </a:xfrm>
-          <a:prstGeom prst="rect">
-            <a:avLst/>
-          </a:prstGeom>
-          <a:noFill/>
-        </p:spPr>
-        <p:txBody>
-          <a:bodyPr wrap="square" lIns="25400" rIns="25400" tIns="25400" bIns="25400">
-            <a:spAutoFit/>
-          </a:bodyPr>
-          <a:lstStyle/>
-          <a:p>
-            <a:pPr algn="l">
-              <a:spcBef>
-                <a:spcPts val="0"/>
-              </a:spcBef>
-              <a:spcAft>
-                <a:spcPts val="600"/>
-              </a:spcAft>
-            </a:pPr>
-            <a:r>
-              <a:rPr sz="1400" b="0" i="0">
-                <a:solidFill>
-                  <a:srgbClr val="222A33"/>
-                </a:solidFill>
                 <a:latin typeface="Calibri"/>
               </a:rPr>
-              <a:t>Scripts de conexão/listagem  •  cena oficial (scena com obstaculos)</a:t>
-            </a:r>
-          </a:p>
-        </p:txBody>
-      </p:sp>
-      <p:sp>
-        <p:nvSpPr>
-          <p:cNvPr id="16" name="Rounded Rectangle 15"/>
-          <p:cNvSpPr/>
-          <p:nvPr/>
-        </p:nvSpPr>
-        <p:spPr>
-          <a:xfrm>
-            <a:off x="640080" y="5550408"/>
-            <a:ext cx="10881360" cy="786384"/>
-          </a:xfrm>
-          <a:prstGeom prst="roundRect">
-            <a:avLst/>
-          </a:prstGeom>
-          <a:solidFill>
-            <a:srgbClr val="EEF3F7"/>
-          </a:solidFill>
-          <a:ln w="12700">
-            <a:solidFill>
-              <a:srgbClr val="D0DEE8"/>
-            </a:solidFill>
-          </a:ln>
-          <a:effectLst/>
-        </p:spPr>
-        <p:style>
-          <a:lnRef idx="1">
-            <a:schemeClr val="accent1"/>
-          </a:lnRef>
-          <a:fillRef idx="3">
-            <a:schemeClr val="accent1"/>
-          </a:fillRef>
-          <a:effectRef idx="2">
-            <a:schemeClr val="accent1"/>
-          </a:effectRef>
-          <a:fontRef idx="minor">
-            <a:schemeClr val="lt1"/>
-          </a:fontRef>
-        </p:style>
-        <p:txBody>
-          <a:bodyPr rtlCol="0" anchor="ctr"/>
-          <a:lstStyle/>
-          <a:p>
-            <a:pPr algn="ctr"/>
-          </a:p>
-        </p:txBody>
-      </p:sp>
-      <p:sp>
-        <p:nvSpPr>
-          <p:cNvPr id="17" name="TextBox 16"/>
-          <p:cNvSpPr txBox="1"/>
-          <p:nvPr/>
-        </p:nvSpPr>
-        <p:spPr>
-          <a:xfrm>
-            <a:off x="868680" y="5678424"/>
-            <a:ext cx="4023360" cy="548640"/>
-          </a:xfrm>
-          <a:prstGeom prst="rect">
-            <a:avLst/>
-          </a:prstGeom>
-          <a:noFill/>
-        </p:spPr>
-        <p:txBody>
-          <a:bodyPr wrap="square" lIns="25400" rIns="25400" tIns="25400" bIns="25400">
-            <a:spAutoFit/>
-          </a:bodyPr>
-          <a:lstStyle/>
-          <a:p>
-            <a:pPr algn="l">
-              <a:spcBef>
-                <a:spcPts val="0"/>
-              </a:spcBef>
-              <a:spcAft>
-                <a:spcPts val="600"/>
-              </a:spcAft>
-            </a:pPr>
-            <a:r>
-              <a:rPr sz="1500" b="1" i="0">
-                <a:solidFill>
-                  <a:srgbClr val="065A82"/>
-                </a:solidFill>
-                <a:latin typeface="Consolas"/>
-              </a:rPr>
-              <a:t>docs/  •  legado/</a:t>
-            </a:r>
-          </a:p>
-        </p:txBody>
-      </p:sp>
-      <p:sp>
-        <p:nvSpPr>
-          <p:cNvPr id="18" name="TextBox 17"/>
-          <p:cNvSpPr txBox="1"/>
-          <p:nvPr/>
-        </p:nvSpPr>
-        <p:spPr>
-          <a:xfrm>
-            <a:off x="5029200" y="5678424"/>
-            <a:ext cx="6309360" cy="548640"/>
-          </a:xfrm>
-          <a:prstGeom prst="rect">
-            <a:avLst/>
-          </a:prstGeom>
-          <a:noFill/>
-        </p:spPr>
-        <p:txBody>
-          <a:bodyPr wrap="square" lIns="25400" rIns="25400" tIns="25400" bIns="25400">
-            <a:spAutoFit/>
-          </a:bodyPr>
-          <a:lstStyle/>
-          <a:p>
-            <a:pPr algn="l">
-              <a:spcBef>
-                <a:spcPts val="0"/>
-              </a:spcBef>
-              <a:spcAft>
-                <a:spcPts val="600"/>
-              </a:spcAft>
-            </a:pPr>
-            <a:r>
-              <a:rPr sz="1400" b="0" i="0">
-                <a:solidFill>
-                  <a:srgbClr val="222A33"/>
+              <a:t>Replanejar + recuperar</a:t>
+            </a:r>
+          </a:p>
+          <a:p>
+            <a:pPr algn="l">
+              <a:spcBef>
+                <a:spcPts val="0"/>
+              </a:spcBef>
+              <a:spcAft>
+                <a:spcPts val="0"/>
+              </a:spcAft>
+            </a:pPr>
+            <a:r>
+              <a:rPr sz="1350" b="0" i="0">
+                <a:solidFill>
+                  <a:srgbClr val="5A6672"/>
                 </a:solidFill>
                 <a:latin typeface="Calibri"/>
               </a:rPr>
-              <a:t>Relatório, apresentação e artigo  •  arquivos antigos preservados</a:t>
+              <a:t>Sem progresso por 30 passos: replaneja da posição atual, recua e gira para escapar.</a:t>
             </a:r>
           </a:p>
         </p:txBody>
@@ -4223,7 +3995,7 @@
                 </a:solidFill>
                 <a:latin typeface="Calibri"/>
               </a:rPr>
-              <a:t>RESULTADOS</a:t>
+              <a:t>VISUALIZAÇÃO</a:t>
             </a:r>
           </a:p>
           <a:p>
@@ -4242,55 +4014,35 @@
                 </a:solidFill>
                 <a:latin typeface="Cambria"/>
               </a:rPr>
-              <a:t>O que já foi validado</a:t>
-            </a:r>
-          </a:p>
-        </p:txBody>
-      </p:sp>
-      <p:sp>
-        <p:nvSpPr>
-          <p:cNvPr id="4" name="Rounded Rectangle 3"/>
-          <p:cNvSpPr/>
-          <p:nvPr/>
-        </p:nvSpPr>
-        <p:spPr>
-          <a:xfrm>
-            <a:off x="640080" y="1965960"/>
-            <a:ext cx="3538728" cy="1920240"/>
-          </a:xfrm>
-          <a:prstGeom prst="roundRect">
-            <a:avLst/>
-          </a:prstGeom>
-          <a:solidFill>
-            <a:srgbClr val="1B2A4A"/>
-          </a:solidFill>
-          <a:ln>
-            <a:noFill/>
-          </a:ln>
-          <a:effectLst/>
-        </p:spPr>
-        <p:style>
-          <a:lnRef idx="1">
-            <a:schemeClr val="accent1"/>
-          </a:lnRef>
-          <a:fillRef idx="3">
-            <a:schemeClr val="accent1"/>
-          </a:fillRef>
-          <a:effectRef idx="2">
-            <a:schemeClr val="accent1"/>
-          </a:effectRef>
-          <a:fontRef idx="minor">
-            <a:schemeClr val="lt1"/>
-          </a:fontRef>
-        </p:style>
-        <p:txBody>
-          <a:bodyPr rtlCol="0" anchor="ctr"/>
-          <a:lstStyle/>
-          <a:p>
-            <a:pPr algn="ctr"/>
-          </a:p>
-        </p:txBody>
-      </p:sp>
+              <a:t>Mapa de Ocupação + Rota a cada simulação</a:t>
+            </a:r>
+          </a:p>
+        </p:txBody>
+      </p:sp>
+      <p:pic>
+        <p:nvPicPr>
+          <p:cNvPr id="4" name="Picture 3" descr="fig_mapa_rota.png"/>
+          <p:cNvPicPr>
+            <a:picLocks noChangeAspect="1"/>
+          </p:cNvPicPr>
+          <p:nvPr/>
+        </p:nvPicPr>
+        <p:blipFill>
+          <a:blip r:embed="rId2"/>
+          <a:stretch>
+            <a:fillRect/>
+          </a:stretch>
+        </p:blipFill>
+        <p:spPr>
+          <a:xfrm>
+            <a:off x="1328562" y="1737360"/>
+            <a:ext cx="4658074" cy="4754880"/>
+          </a:xfrm>
+          <a:prstGeom prst="rect">
+            <a:avLst/>
+          </a:prstGeom>
+        </p:spPr>
+      </p:pic>
       <p:sp>
         <p:nvSpPr>
           <p:cNvPr id="5" name="TextBox 4"/>
@@ -4299,8 +4051,8 @@
         </p:nvSpPr>
         <p:spPr>
           <a:xfrm>
-            <a:off x="822959" y="2148840"/>
-            <a:ext cx="3172968" cy="1554480"/>
+            <a:off x="6949440" y="2103120"/>
+            <a:ext cx="4663440" cy="4206240"/>
           </a:xfrm>
           <a:prstGeom prst="rect">
             <a:avLst/>
@@ -4312,354 +4064,100 @@
             <a:spAutoFit/>
           </a:bodyPr>
           <a:lstStyle/>
-          <a:p>
-            <a:pPr algn="ctr">
-              <a:spcBef>
-                <a:spcPts val="0"/>
-              </a:spcBef>
-              <a:spcAft>
-                <a:spcPts val="200"/>
-              </a:spcAft>
-            </a:pPr>
-            <a:r>
-              <a:rPr sz="4000" b="1" i="0">
-                <a:solidFill>
-                  <a:srgbClr val="02C39A"/>
-                </a:solidFill>
-                <a:latin typeface="Cambria"/>
-              </a:rPr>
-              <a:t>129 → 9</a:t>
-            </a:r>
-          </a:p>
-          <a:p>
-            <a:pPr algn="ctr">
-              <a:spcBef>
-                <a:spcPts val="0"/>
-              </a:spcBef>
-              <a:spcAft>
-                <a:spcPts val="0"/>
-              </a:spcAft>
-            </a:pPr>
-            <a:r>
-              <a:rPr sz="1400" b="0" i="0">
-                <a:solidFill>
-                  <a:srgbClr val="FFFFFF"/>
+          <a:p/>
+          <a:p>
+            <a:pPr algn="l">
+              <a:spcBef>
+                <a:spcPts val="0"/>
+              </a:spcBef>
+              <a:spcAft>
+                <a:spcPts val="1100"/>
+              </a:spcAft>
+            </a:pPr>
+            <a:r>
+              <a:rPr sz="1450" b="0" i="0">
+                <a:solidFill>
+                  <a:srgbClr val="222A33"/>
                 </a:solidFill>
                 <a:latin typeface="Calibri"/>
               </a:rPr>
-              <a:t>nós reduzidos a
-pontos-chave</a:t>
-            </a:r>
-          </a:p>
-        </p:txBody>
-      </p:sp>
-      <p:sp>
-        <p:nvSpPr>
-          <p:cNvPr id="6" name="Rounded Rectangle 5"/>
-          <p:cNvSpPr/>
-          <p:nvPr/>
-        </p:nvSpPr>
-        <p:spPr>
-          <a:xfrm>
-            <a:off x="4361688" y="1965960"/>
-            <a:ext cx="3538728" cy="1920240"/>
-          </a:xfrm>
-          <a:prstGeom prst="roundRect">
-            <a:avLst/>
-          </a:prstGeom>
-          <a:solidFill>
-            <a:srgbClr val="1B2A4A"/>
-          </a:solidFill>
-          <a:ln>
-            <a:noFill/>
-          </a:ln>
-          <a:effectLst/>
-        </p:spPr>
-        <p:style>
-          <a:lnRef idx="1">
-            <a:schemeClr val="accent1"/>
-          </a:lnRef>
-          <a:fillRef idx="3">
-            <a:schemeClr val="accent1"/>
-          </a:fillRef>
-          <a:effectRef idx="2">
-            <a:schemeClr val="accent1"/>
-          </a:effectRef>
-          <a:fontRef idx="minor">
-            <a:schemeClr val="lt1"/>
-          </a:fontRef>
-        </p:style>
-        <p:txBody>
-          <a:bodyPr rtlCol="0" anchor="ctr"/>
-          <a:lstStyle/>
-          <a:p>
-            <a:pPr algn="ctr"/>
-          </a:p>
-        </p:txBody>
-      </p:sp>
-      <p:sp>
-        <p:nvSpPr>
-          <p:cNvPr id="7" name="TextBox 6"/>
-          <p:cNvSpPr txBox="1"/>
-          <p:nvPr/>
-        </p:nvSpPr>
-        <p:spPr>
-          <a:xfrm>
-            <a:off x="4544568" y="2148840"/>
-            <a:ext cx="3172968" cy="1554480"/>
-          </a:xfrm>
-          <a:prstGeom prst="rect">
-            <a:avLst/>
-          </a:prstGeom>
-          <a:noFill/>
-        </p:spPr>
-        <p:txBody>
-          <a:bodyPr wrap="square" lIns="25400" rIns="25400" tIns="25400" bIns="25400">
-            <a:spAutoFit/>
-          </a:bodyPr>
-          <a:lstStyle/>
-          <a:p>
-            <a:pPr algn="ctr">
-              <a:spcBef>
-                <a:spcPts val="0"/>
-              </a:spcBef>
-              <a:spcAft>
-                <a:spcPts val="200"/>
-              </a:spcAft>
-            </a:pPr>
-            <a:r>
-              <a:rPr sz="4000" b="1" i="0">
-                <a:solidFill>
-                  <a:srgbClr val="02C39A"/>
-                </a:solidFill>
-                <a:latin typeface="Cambria"/>
-              </a:rPr>
-              <a:t>256²</a:t>
-            </a:r>
-          </a:p>
-          <a:p>
-            <a:pPr algn="ctr">
-              <a:spcBef>
-                <a:spcPts val="0"/>
-              </a:spcBef>
-              <a:spcAft>
-                <a:spcPts val="0"/>
-              </a:spcAft>
-            </a:pPr>
-            <a:r>
-              <a:rPr sz="1400" b="0" i="0">
-                <a:solidFill>
-                  <a:srgbClr val="FFFFFF"/>
+              <a:t>•  Janela ao vivo aberta em toda simulação, atualizada durante a navegação.</a:t>
+            </a:r>
+          </a:p>
+          <a:p>
+            <a:pPr algn="l">
+              <a:spcBef>
+                <a:spcPts val="0"/>
+              </a:spcBef>
+              <a:spcAft>
+                <a:spcPts val="1100"/>
+              </a:spcAft>
+            </a:pPr>
+            <a:r>
+              <a:rPr sz="1450" b="0" i="0">
+                <a:solidFill>
+                  <a:srgbClr val="222A33"/>
                 </a:solidFill>
                 <a:latin typeface="Calibri"/>
               </a:rPr>
-              <a:t>células na grade
-de ocupação</a:t>
-            </a:r>
-          </a:p>
-        </p:txBody>
-      </p:sp>
-      <p:sp>
-        <p:nvSpPr>
-          <p:cNvPr id="8" name="Rounded Rectangle 7"/>
-          <p:cNvSpPr/>
-          <p:nvPr/>
-        </p:nvSpPr>
-        <p:spPr>
-          <a:xfrm>
-            <a:off x="8083296" y="1965960"/>
-            <a:ext cx="3538728" cy="1920240"/>
-          </a:xfrm>
-          <a:prstGeom prst="roundRect">
-            <a:avLst/>
-          </a:prstGeom>
-          <a:solidFill>
-            <a:srgbClr val="1B2A4A"/>
-          </a:solidFill>
-          <a:ln>
-            <a:noFill/>
-          </a:ln>
-          <a:effectLst/>
-        </p:spPr>
-        <p:style>
-          <a:lnRef idx="1">
-            <a:schemeClr val="accent1"/>
-          </a:lnRef>
-          <a:fillRef idx="3">
-            <a:schemeClr val="accent1"/>
-          </a:fillRef>
-          <a:effectRef idx="2">
-            <a:schemeClr val="accent1"/>
-          </a:effectRef>
-          <a:fontRef idx="minor">
-            <a:schemeClr val="lt1"/>
-          </a:fontRef>
-        </p:style>
-        <p:txBody>
-          <a:bodyPr rtlCol="0" anchor="ctr"/>
-          <a:lstStyle/>
-          <a:p>
-            <a:pPr algn="ctr"/>
-          </a:p>
-        </p:txBody>
-      </p:sp>
-      <p:sp>
-        <p:nvSpPr>
-          <p:cNvPr id="9" name="TextBox 8"/>
-          <p:cNvSpPr txBox="1"/>
-          <p:nvPr/>
-        </p:nvSpPr>
-        <p:spPr>
-          <a:xfrm>
-            <a:off x="8266175" y="2148840"/>
-            <a:ext cx="3172968" cy="1554480"/>
-          </a:xfrm>
-          <a:prstGeom prst="rect">
-            <a:avLst/>
-          </a:prstGeom>
-          <a:noFill/>
-        </p:spPr>
-        <p:txBody>
-          <a:bodyPr wrap="square" lIns="25400" rIns="25400" tIns="25400" bIns="25400">
-            <a:spAutoFit/>
-          </a:bodyPr>
-          <a:lstStyle/>
-          <a:p>
-            <a:pPr algn="ctr">
-              <a:spcBef>
-                <a:spcPts val="0"/>
-              </a:spcBef>
-              <a:spcAft>
-                <a:spcPts val="200"/>
-              </a:spcAft>
-            </a:pPr>
-            <a:r>
-              <a:rPr sz="4000" b="1" i="0">
-                <a:solidFill>
-                  <a:srgbClr val="02C39A"/>
-                </a:solidFill>
-                <a:latin typeface="Cambria"/>
-              </a:rPr>
-              <a:t>A*+DWA</a:t>
-            </a:r>
-          </a:p>
-          <a:p>
-            <a:pPr algn="ctr">
-              <a:spcBef>
-                <a:spcPts val="0"/>
-              </a:spcBef>
-              <a:spcAft>
-                <a:spcPts val="0"/>
-              </a:spcAft>
-            </a:pPr>
-            <a:r>
-              <a:rPr sz="1400" b="0" i="0">
-                <a:solidFill>
-                  <a:srgbClr val="FFFFFF"/>
+              <a:t>•  Mostra: obstáculos da grade, rota A*, pontos-chave, robô, goal e trajetória real.</a:t>
+            </a:r>
+          </a:p>
+          <a:p>
+            <a:pPr algn="l">
+              <a:spcBef>
+                <a:spcPts val="0"/>
+              </a:spcBef>
+              <a:spcAft>
+                <a:spcPts val="1100"/>
+              </a:spcAft>
+            </a:pPr>
+            <a:r>
+              <a:rPr sz="1450" b="0" i="0">
+                <a:solidFill>
+                  <a:srgbClr val="222A33"/>
                 </a:solidFill>
                 <a:latin typeface="Calibri"/>
               </a:rPr>
-              <a:t>fusão por
-pontos-chave</a:t>
-            </a:r>
-          </a:p>
-        </p:txBody>
-      </p:sp>
-      <p:sp>
-        <p:nvSpPr>
-          <p:cNvPr id="10" name="TextBox 9"/>
-          <p:cNvSpPr txBox="1"/>
-          <p:nvPr/>
-        </p:nvSpPr>
-        <p:spPr>
-          <a:xfrm>
-            <a:off x="640080" y="4206240"/>
-            <a:ext cx="10881360" cy="2194560"/>
-          </a:xfrm>
-          <a:prstGeom prst="rect">
-            <a:avLst/>
-          </a:prstGeom>
-          <a:noFill/>
-        </p:spPr>
-        <p:txBody>
-          <a:bodyPr wrap="square" lIns="25400" rIns="25400" tIns="25400" bIns="25400">
-            <a:spAutoFit/>
-          </a:bodyPr>
-          <a:lstStyle/>
-          <a:p>
-            <a:pPr algn="l">
-              <a:spcBef>
-                <a:spcPts val="0"/>
-              </a:spcBef>
-              <a:spcAft>
-                <a:spcPts val="800"/>
-              </a:spcAft>
-            </a:pPr>
-            <a:r>
-              <a:rPr sz="1700" b="1" i="0">
-                <a:solidFill>
-                  <a:srgbClr val="065A82"/>
+              <a:t>•  Rota redesenhada a cada replanejamento.</a:t>
+            </a:r>
+          </a:p>
+          <a:p>
+            <a:pPr algn="l">
+              <a:spcBef>
+                <a:spcPts val="0"/>
+              </a:spcBef>
+              <a:spcAft>
+                <a:spcPts val="1100"/>
+              </a:spcAft>
+            </a:pPr>
+            <a:r>
+              <a:rPr sz="1450" b="0" i="0">
+                <a:solidFill>
+                  <a:srgbClr val="222A33"/>
                 </a:solidFill>
                 <a:latin typeface="Calibri"/>
               </a:rPr>
-              <a:t>A validar no CoppeliaSim:</a:t>
-            </a:r>
-          </a:p>
-          <a:p>
-            <a:pPr algn="l">
-              <a:spcBef>
-                <a:spcPts val="0"/>
-              </a:spcBef>
-              <a:spcAft>
-                <a:spcPts val="700"/>
-              </a:spcAft>
-            </a:pPr>
-            <a:r>
-              <a:rPr sz="1500" b="0" i="0">
+              <a:t>•  Figura salva automaticamente em mapa_rota.png ao final.</a:t>
+            </a:r>
+          </a:p>
+          <a:p>
+            <a:pPr algn="l">
+              <a:spcBef>
+                <a:spcPts val="0"/>
+              </a:spcBef>
+              <a:spcAft>
+                <a:spcPts val="1100"/>
+              </a:spcAft>
+            </a:pPr>
+            <a:r>
+              <a:rPr sz="1450" b="0" i="0">
                 <a:solidFill>
                   <a:srgbClr val="222A33"/>
                 </a:solidFill>
                 <a:latin typeface="Calibri"/>
               </a:rPr>
-              <a:t>•  Abrir cenas/scena com obstaculos.ttt e executar  python main.py</a:t>
-            </a:r>
-          </a:p>
-          <a:p>
-            <a:pPr algn="l">
-              <a:spcBef>
-                <a:spcPts val="0"/>
-              </a:spcBef>
-              <a:spcAft>
-                <a:spcPts val="700"/>
-              </a:spcAft>
-            </a:pPr>
-            <a:r>
-              <a:rPr sz="1500" b="0" i="0">
-                <a:solidFill>
-                  <a:srgbClr val="222A33"/>
-                </a:solidFill>
-                <a:latin typeface="Calibri"/>
-              </a:rPr>
-              <a:t>•  Confirmar que a base avança no sentido dos sensores (correção de marcha)</a:t>
-            </a:r>
-          </a:p>
-          <a:p>
-            <a:pPr algn="l">
-              <a:spcBef>
-                <a:spcPts val="0"/>
-              </a:spcBef>
-              <a:spcAft>
-                <a:spcPts val="700"/>
-              </a:spcAft>
-            </a:pPr>
-            <a:r>
-              <a:rPr sz="1500" b="0" i="0">
-                <a:solidFill>
-                  <a:srgbClr val="222A33"/>
-                </a:solidFill>
-                <a:latin typeface="Calibri"/>
-              </a:rPr>
-              <a:t>•  Conferir a fidelidade da grade de ocupação e ajustar limiar/ganhos se preciso</a:t>
+              <a:t>•  No exemplo: o A* evita o vão apertado e escolhe o corredor largo; a trajetória real (magenta) segue a rota (azul).</a:t>
             </a:r>
           </a:p>
         </p:txBody>
@@ -4697,6 +4195,884 @@
             <a:avLst/>
           </a:prstGeom>
           <a:solidFill>
+            <a:srgbClr val="FFFFFF"/>
+          </a:solidFill>
+          <a:ln>
+            <a:noFill/>
+          </a:ln>
+          <a:effectLst/>
+        </p:spPr>
+        <p:style>
+          <a:lnRef idx="1">
+            <a:schemeClr val="accent1"/>
+          </a:lnRef>
+          <a:fillRef idx="3">
+            <a:schemeClr val="accent1"/>
+          </a:fillRef>
+          <a:effectRef idx="2">
+            <a:schemeClr val="accent1"/>
+          </a:effectRef>
+          <a:fontRef idx="minor">
+            <a:schemeClr val="lt1"/>
+          </a:fontRef>
+        </p:style>
+        <p:txBody>
+          <a:bodyPr rtlCol="0" anchor="ctr"/>
+          <a:lstStyle/>
+          <a:p>
+            <a:pPr algn="ctr"/>
+          </a:p>
+        </p:txBody>
+      </p:sp>
+      <p:sp>
+        <p:nvSpPr>
+          <p:cNvPr id="3" name="TextBox 2"/>
+          <p:cNvSpPr txBox="1"/>
+          <p:nvPr/>
+        </p:nvSpPr>
+        <p:spPr>
+          <a:xfrm>
+            <a:off x="548640" y="411480"/>
+            <a:ext cx="11064240" cy="1188720"/>
+          </a:xfrm>
+          <a:prstGeom prst="rect">
+            <a:avLst/>
+          </a:prstGeom>
+          <a:noFill/>
+        </p:spPr>
+        <p:txBody>
+          <a:bodyPr wrap="square" lIns="25400" rIns="25400" tIns="25400" bIns="25400">
+            <a:spAutoFit/>
+          </a:bodyPr>
+          <a:lstStyle/>
+          <a:p>
+            <a:pPr algn="l">
+              <a:spcBef>
+                <a:spcPts val="0"/>
+              </a:spcBef>
+              <a:spcAft>
+                <a:spcPts val="200"/>
+              </a:spcAft>
+            </a:pPr>
+            <a:r>
+              <a:rPr sz="1300" b="1" i="0">
+                <a:solidFill>
+                  <a:srgbClr val="02C39A"/>
+                </a:solidFill>
+                <a:latin typeface="Calibri"/>
+              </a:rPr>
+              <a:t>ENGENHARIA</a:t>
+            </a:r>
+          </a:p>
+          <a:p>
+            <a:pPr algn="l">
+              <a:spcBef>
+                <a:spcPts val="0"/>
+              </a:spcBef>
+              <a:spcAft>
+                <a:spcPts val="0"/>
+              </a:spcAft>
+            </a:pPr>
+            <a:r>
+              <a:rPr sz="3200" b="1" i="0">
+                <a:solidFill>
+                  <a:srgbClr val="222A33"/>
+                </a:solidFill>
+                <a:latin typeface="Cambria"/>
+              </a:rPr>
+              <a:t>Organização do projeto</a:t>
+            </a:r>
+          </a:p>
+        </p:txBody>
+      </p:sp>
+      <p:sp>
+        <p:nvSpPr>
+          <p:cNvPr id="4" name="Rounded Rectangle 3"/>
+          <p:cNvSpPr/>
+          <p:nvPr/>
+        </p:nvSpPr>
+        <p:spPr>
+          <a:xfrm>
+            <a:off x="640080" y="1965960"/>
+            <a:ext cx="10881360" cy="786384"/>
+          </a:xfrm>
+          <a:prstGeom prst="roundRect">
+            <a:avLst/>
+          </a:prstGeom>
+          <a:solidFill>
+            <a:srgbClr val="EEF3F7"/>
+          </a:solidFill>
+          <a:ln w="12700">
+            <a:solidFill>
+              <a:srgbClr val="D0DEE8"/>
+            </a:solidFill>
+          </a:ln>
+          <a:effectLst/>
+        </p:spPr>
+        <p:style>
+          <a:lnRef idx="1">
+            <a:schemeClr val="accent1"/>
+          </a:lnRef>
+          <a:fillRef idx="3">
+            <a:schemeClr val="accent1"/>
+          </a:fillRef>
+          <a:effectRef idx="2">
+            <a:schemeClr val="accent1"/>
+          </a:effectRef>
+          <a:fontRef idx="minor">
+            <a:schemeClr val="lt1"/>
+          </a:fontRef>
+        </p:style>
+        <p:txBody>
+          <a:bodyPr rtlCol="0" anchor="ctr"/>
+          <a:lstStyle/>
+          <a:p>
+            <a:pPr algn="ctr"/>
+          </a:p>
+        </p:txBody>
+      </p:sp>
+      <p:sp>
+        <p:nvSpPr>
+          <p:cNvPr id="5" name="TextBox 4"/>
+          <p:cNvSpPr txBox="1"/>
+          <p:nvPr/>
+        </p:nvSpPr>
+        <p:spPr>
+          <a:xfrm>
+            <a:off x="868680" y="2093976"/>
+            <a:ext cx="4023360" cy="548640"/>
+          </a:xfrm>
+          <a:prstGeom prst="rect">
+            <a:avLst/>
+          </a:prstGeom>
+          <a:noFill/>
+        </p:spPr>
+        <p:txBody>
+          <a:bodyPr wrap="square" lIns="25400" rIns="25400" tIns="25400" bIns="25400">
+            <a:spAutoFit/>
+          </a:bodyPr>
+          <a:lstStyle/>
+          <a:p>
+            <a:pPr algn="l">
+              <a:spcBef>
+                <a:spcPts val="0"/>
+              </a:spcBef>
+              <a:spcAft>
+                <a:spcPts val="600"/>
+              </a:spcAft>
+            </a:pPr>
+            <a:r>
+              <a:rPr sz="1500" b="1" i="0">
+                <a:solidFill>
+                  <a:srgbClr val="065A82"/>
+                </a:solidFill>
+                <a:latin typeface="Consolas"/>
+              </a:rPr>
+              <a:t>main.py</a:t>
+            </a:r>
+          </a:p>
+        </p:txBody>
+      </p:sp>
+      <p:sp>
+        <p:nvSpPr>
+          <p:cNvPr id="6" name="TextBox 5"/>
+          <p:cNvSpPr txBox="1"/>
+          <p:nvPr/>
+        </p:nvSpPr>
+        <p:spPr>
+          <a:xfrm>
+            <a:off x="5029200" y="2093976"/>
+            <a:ext cx="6309360" cy="548640"/>
+          </a:xfrm>
+          <a:prstGeom prst="rect">
+            <a:avLst/>
+          </a:prstGeom>
+          <a:noFill/>
+        </p:spPr>
+        <p:txBody>
+          <a:bodyPr wrap="square" lIns="25400" rIns="25400" tIns="25400" bIns="25400">
+            <a:spAutoFit/>
+          </a:bodyPr>
+          <a:lstStyle/>
+          <a:p>
+            <a:pPr algn="l">
+              <a:spcBef>
+                <a:spcPts val="0"/>
+              </a:spcBef>
+              <a:spcAft>
+                <a:spcPts val="600"/>
+              </a:spcAft>
+            </a:pPr>
+            <a:r>
+              <a:rPr sz="1400" b="0" i="0">
+                <a:solidFill>
+                  <a:srgbClr val="222A33"/>
+                </a:solidFill>
+                <a:latin typeface="Calibri"/>
+              </a:rPr>
+              <a:t>Robo (CoppeliaSim) + Navegador (A*+DWA+recuperação) + loop</a:t>
+            </a:r>
+          </a:p>
+        </p:txBody>
+      </p:sp>
+      <p:sp>
+        <p:nvSpPr>
+          <p:cNvPr id="7" name="Rounded Rectangle 6"/>
+          <p:cNvSpPr/>
+          <p:nvPr/>
+        </p:nvSpPr>
+        <p:spPr>
+          <a:xfrm>
+            <a:off x="640080" y="2862072"/>
+            <a:ext cx="10881360" cy="786384"/>
+          </a:xfrm>
+          <a:prstGeom prst="roundRect">
+            <a:avLst/>
+          </a:prstGeom>
+          <a:solidFill>
+            <a:srgbClr val="FFFFFF"/>
+          </a:solidFill>
+          <a:ln w="12700">
+            <a:solidFill>
+              <a:srgbClr val="D0DEE8"/>
+            </a:solidFill>
+          </a:ln>
+          <a:effectLst/>
+        </p:spPr>
+        <p:style>
+          <a:lnRef idx="1">
+            <a:schemeClr val="accent1"/>
+          </a:lnRef>
+          <a:fillRef idx="3">
+            <a:schemeClr val="accent1"/>
+          </a:fillRef>
+          <a:effectRef idx="2">
+            <a:schemeClr val="accent1"/>
+          </a:effectRef>
+          <a:fontRef idx="minor">
+            <a:schemeClr val="lt1"/>
+          </a:fontRef>
+        </p:style>
+        <p:txBody>
+          <a:bodyPr rtlCol="0" anchor="ctr"/>
+          <a:lstStyle/>
+          <a:p>
+            <a:pPr algn="ctr"/>
+          </a:p>
+        </p:txBody>
+      </p:sp>
+      <p:sp>
+        <p:nvSpPr>
+          <p:cNvPr id="8" name="TextBox 7"/>
+          <p:cNvSpPr txBox="1"/>
+          <p:nvPr/>
+        </p:nvSpPr>
+        <p:spPr>
+          <a:xfrm>
+            <a:off x="868680" y="2990088"/>
+            <a:ext cx="4023360" cy="548640"/>
+          </a:xfrm>
+          <a:prstGeom prst="rect">
+            <a:avLst/>
+          </a:prstGeom>
+          <a:noFill/>
+        </p:spPr>
+        <p:txBody>
+          <a:bodyPr wrap="square" lIns="25400" rIns="25400" tIns="25400" bIns="25400">
+            <a:spAutoFit/>
+          </a:bodyPr>
+          <a:lstStyle/>
+          <a:p>
+            <a:pPr algn="l">
+              <a:spcBef>
+                <a:spcPts val="0"/>
+              </a:spcBef>
+              <a:spcAft>
+                <a:spcPts val="600"/>
+              </a:spcAft>
+            </a:pPr>
+            <a:r>
+              <a:rPr sz="1500" b="1" i="0">
+                <a:solidFill>
+                  <a:srgbClr val="065A82"/>
+                </a:solidFill>
+                <a:latin typeface="Consolas"/>
+              </a:rPr>
+              <a:t>dynamic_window_approach.py</a:t>
+            </a:r>
+          </a:p>
+        </p:txBody>
+      </p:sp>
+      <p:sp>
+        <p:nvSpPr>
+          <p:cNvPr id="9" name="TextBox 8"/>
+          <p:cNvSpPr txBox="1"/>
+          <p:nvPr/>
+        </p:nvSpPr>
+        <p:spPr>
+          <a:xfrm>
+            <a:off x="5029200" y="2990088"/>
+            <a:ext cx="6309360" cy="548640"/>
+          </a:xfrm>
+          <a:prstGeom prst="rect">
+            <a:avLst/>
+          </a:prstGeom>
+          <a:noFill/>
+        </p:spPr>
+        <p:txBody>
+          <a:bodyPr wrap="square" lIns="25400" rIns="25400" tIns="25400" bIns="25400">
+            <a:spAutoFit/>
+          </a:bodyPr>
+          <a:lstStyle/>
+          <a:p>
+            <a:pPr algn="l">
+              <a:spcBef>
+                <a:spcPts val="0"/>
+              </a:spcBef>
+              <a:spcAft>
+                <a:spcPts val="600"/>
+              </a:spcAft>
+            </a:pPr>
+            <a:r>
+              <a:rPr sz="1400" b="0" i="0">
+                <a:solidFill>
+                  <a:srgbClr val="222A33"/>
+                </a:solidFill>
+                <a:latin typeface="Calibri"/>
+              </a:rPr>
+              <a:t>A* melhorado + penalidade de proximidade + DWAController</a:t>
+            </a:r>
+          </a:p>
+        </p:txBody>
+      </p:sp>
+      <p:sp>
+        <p:nvSpPr>
+          <p:cNvPr id="10" name="Rounded Rectangle 9"/>
+          <p:cNvSpPr/>
+          <p:nvPr/>
+        </p:nvSpPr>
+        <p:spPr>
+          <a:xfrm>
+            <a:off x="640080" y="3758183"/>
+            <a:ext cx="10881360" cy="786384"/>
+          </a:xfrm>
+          <a:prstGeom prst="roundRect">
+            <a:avLst/>
+          </a:prstGeom>
+          <a:solidFill>
+            <a:srgbClr val="EEF3F7"/>
+          </a:solidFill>
+          <a:ln w="12700">
+            <a:solidFill>
+              <a:srgbClr val="D0DEE8"/>
+            </a:solidFill>
+          </a:ln>
+          <a:effectLst/>
+        </p:spPr>
+        <p:style>
+          <a:lnRef idx="1">
+            <a:schemeClr val="accent1"/>
+          </a:lnRef>
+          <a:fillRef idx="3">
+            <a:schemeClr val="accent1"/>
+          </a:fillRef>
+          <a:effectRef idx="2">
+            <a:schemeClr val="accent1"/>
+          </a:effectRef>
+          <a:fontRef idx="minor">
+            <a:schemeClr val="lt1"/>
+          </a:fontRef>
+        </p:style>
+        <p:txBody>
+          <a:bodyPr rtlCol="0" anchor="ctr"/>
+          <a:lstStyle/>
+          <a:p>
+            <a:pPr algn="ctr"/>
+          </a:p>
+        </p:txBody>
+      </p:sp>
+      <p:sp>
+        <p:nvSpPr>
+          <p:cNvPr id="11" name="TextBox 10"/>
+          <p:cNvSpPr txBox="1"/>
+          <p:nvPr/>
+        </p:nvSpPr>
+        <p:spPr>
+          <a:xfrm>
+            <a:off x="868680" y="3886199"/>
+            <a:ext cx="4023360" cy="548640"/>
+          </a:xfrm>
+          <a:prstGeom prst="rect">
+            <a:avLst/>
+          </a:prstGeom>
+          <a:noFill/>
+        </p:spPr>
+        <p:txBody>
+          <a:bodyPr wrap="square" lIns="25400" rIns="25400" tIns="25400" bIns="25400">
+            <a:spAutoFit/>
+          </a:bodyPr>
+          <a:lstStyle/>
+          <a:p>
+            <a:pPr algn="l">
+              <a:spcBef>
+                <a:spcPts val="0"/>
+              </a:spcBef>
+              <a:spcAft>
+                <a:spcPts val="600"/>
+              </a:spcAft>
+            </a:pPr>
+            <a:r>
+              <a:rPr sz="1500" b="1" i="0">
+                <a:solidFill>
+                  <a:srgbClr val="065A82"/>
+                </a:solidFill>
+                <a:latin typeface="Consolas"/>
+              </a:rPr>
+              <a:t>mapa_ocupacao.py</a:t>
+            </a:r>
+          </a:p>
+        </p:txBody>
+      </p:sp>
+      <p:sp>
+        <p:nvSpPr>
+          <p:cNvPr id="12" name="TextBox 11"/>
+          <p:cNvSpPr txBox="1"/>
+          <p:nvPr/>
+        </p:nvSpPr>
+        <p:spPr>
+          <a:xfrm>
+            <a:off x="5029200" y="3886199"/>
+            <a:ext cx="6309360" cy="548640"/>
+          </a:xfrm>
+          <a:prstGeom prst="rect">
+            <a:avLst/>
+          </a:prstGeom>
+          <a:noFill/>
+        </p:spPr>
+        <p:txBody>
+          <a:bodyPr wrap="square" lIns="25400" rIns="25400" tIns="25400" bIns="25400">
+            <a:spAutoFit/>
+          </a:bodyPr>
+          <a:lstStyle/>
+          <a:p>
+            <a:pPr algn="l">
+              <a:spcBef>
+                <a:spcPts val="0"/>
+              </a:spcBef>
+              <a:spcAft>
+                <a:spcPts val="600"/>
+              </a:spcAft>
+            </a:pPr>
+            <a:r>
+              <a:rPr sz="1400" b="0" i="0">
+                <a:solidFill>
+                  <a:srgbClr val="222A33"/>
+                </a:solidFill>
+                <a:latin typeface="Calibri"/>
+              </a:rPr>
+              <a:t>Sensor de visão + Grade de Ocupação (+ fallback bbox)</a:t>
+            </a:r>
+          </a:p>
+        </p:txBody>
+      </p:sp>
+      <p:sp>
+        <p:nvSpPr>
+          <p:cNvPr id="13" name="Rounded Rectangle 12"/>
+          <p:cNvSpPr/>
+          <p:nvPr/>
+        </p:nvSpPr>
+        <p:spPr>
+          <a:xfrm>
+            <a:off x="640080" y="4654296"/>
+            <a:ext cx="10881360" cy="786384"/>
+          </a:xfrm>
+          <a:prstGeom prst="roundRect">
+            <a:avLst/>
+          </a:prstGeom>
+          <a:solidFill>
+            <a:srgbClr val="FFFFFF"/>
+          </a:solidFill>
+          <a:ln w="12700">
+            <a:solidFill>
+              <a:srgbClr val="D0DEE8"/>
+            </a:solidFill>
+          </a:ln>
+          <a:effectLst/>
+        </p:spPr>
+        <p:style>
+          <a:lnRef idx="1">
+            <a:schemeClr val="accent1"/>
+          </a:lnRef>
+          <a:fillRef idx="3">
+            <a:schemeClr val="accent1"/>
+          </a:fillRef>
+          <a:effectRef idx="2">
+            <a:schemeClr val="accent1"/>
+          </a:effectRef>
+          <a:fontRef idx="minor">
+            <a:schemeClr val="lt1"/>
+          </a:fontRef>
+        </p:style>
+        <p:txBody>
+          <a:bodyPr rtlCol="0" anchor="ctr"/>
+          <a:lstStyle/>
+          <a:p>
+            <a:pPr algn="ctr"/>
+          </a:p>
+        </p:txBody>
+      </p:sp>
+      <p:sp>
+        <p:nvSpPr>
+          <p:cNvPr id="14" name="TextBox 13"/>
+          <p:cNvSpPr txBox="1"/>
+          <p:nvPr/>
+        </p:nvSpPr>
+        <p:spPr>
+          <a:xfrm>
+            <a:off x="868680" y="4782312"/>
+            <a:ext cx="4023360" cy="548640"/>
+          </a:xfrm>
+          <a:prstGeom prst="rect">
+            <a:avLst/>
+          </a:prstGeom>
+          <a:noFill/>
+        </p:spPr>
+        <p:txBody>
+          <a:bodyPr wrap="square" lIns="25400" rIns="25400" tIns="25400" bIns="25400">
+            <a:spAutoFit/>
+          </a:bodyPr>
+          <a:lstStyle/>
+          <a:p>
+            <a:pPr algn="l">
+              <a:spcBef>
+                <a:spcPts val="0"/>
+              </a:spcBef>
+              <a:spcAft>
+                <a:spcPts val="600"/>
+              </a:spcAft>
+            </a:pPr>
+            <a:r>
+              <a:rPr sz="1500" b="1" i="0">
+                <a:solidFill>
+                  <a:srgbClr val="065A82"/>
+                </a:solidFill>
+                <a:latin typeface="Consolas"/>
+              </a:rPr>
+              <a:t>visualizacao.py</a:t>
+            </a:r>
+          </a:p>
+        </p:txBody>
+      </p:sp>
+      <p:sp>
+        <p:nvSpPr>
+          <p:cNvPr id="15" name="TextBox 14"/>
+          <p:cNvSpPr txBox="1"/>
+          <p:nvPr/>
+        </p:nvSpPr>
+        <p:spPr>
+          <a:xfrm>
+            <a:off x="5029200" y="4782312"/>
+            <a:ext cx="6309360" cy="548640"/>
+          </a:xfrm>
+          <a:prstGeom prst="rect">
+            <a:avLst/>
+          </a:prstGeom>
+          <a:noFill/>
+        </p:spPr>
+        <p:txBody>
+          <a:bodyPr wrap="square" lIns="25400" rIns="25400" tIns="25400" bIns="25400">
+            <a:spAutoFit/>
+          </a:bodyPr>
+          <a:lstStyle/>
+          <a:p>
+            <a:pPr algn="l">
+              <a:spcBef>
+                <a:spcPts val="0"/>
+              </a:spcBef>
+              <a:spcAft>
+                <a:spcPts val="600"/>
+              </a:spcAft>
+            </a:pPr>
+            <a:r>
+              <a:rPr sz="1400" b="0" i="0">
+                <a:solidFill>
+                  <a:srgbClr val="222A33"/>
+                </a:solidFill>
+                <a:latin typeface="Calibri"/>
+              </a:rPr>
+              <a:t>Janela ao vivo: mapa + rota + trajetória real</a:t>
+            </a:r>
+          </a:p>
+        </p:txBody>
+      </p:sp>
+      <p:sp>
+        <p:nvSpPr>
+          <p:cNvPr id="16" name="Rounded Rectangle 15"/>
+          <p:cNvSpPr/>
+          <p:nvPr/>
+        </p:nvSpPr>
+        <p:spPr>
+          <a:xfrm>
+            <a:off x="640080" y="5550408"/>
+            <a:ext cx="10881360" cy="786384"/>
+          </a:xfrm>
+          <a:prstGeom prst="roundRect">
+            <a:avLst/>
+          </a:prstGeom>
+          <a:solidFill>
+            <a:srgbClr val="EEF3F7"/>
+          </a:solidFill>
+          <a:ln w="12700">
+            <a:solidFill>
+              <a:srgbClr val="D0DEE8"/>
+            </a:solidFill>
+          </a:ln>
+          <a:effectLst/>
+        </p:spPr>
+        <p:style>
+          <a:lnRef idx="1">
+            <a:schemeClr val="accent1"/>
+          </a:lnRef>
+          <a:fillRef idx="3">
+            <a:schemeClr val="accent1"/>
+          </a:fillRef>
+          <a:effectRef idx="2">
+            <a:schemeClr val="accent1"/>
+          </a:effectRef>
+          <a:fontRef idx="minor">
+            <a:schemeClr val="lt1"/>
+          </a:fontRef>
+        </p:style>
+        <p:txBody>
+          <a:bodyPr rtlCol="0" anchor="ctr"/>
+          <a:lstStyle/>
+          <a:p>
+            <a:pPr algn="ctr"/>
+          </a:p>
+        </p:txBody>
+      </p:sp>
+      <p:sp>
+        <p:nvSpPr>
+          <p:cNvPr id="17" name="TextBox 16"/>
+          <p:cNvSpPr txBox="1"/>
+          <p:nvPr/>
+        </p:nvSpPr>
+        <p:spPr>
+          <a:xfrm>
+            <a:off x="868680" y="5678424"/>
+            <a:ext cx="4023360" cy="548640"/>
+          </a:xfrm>
+          <a:prstGeom prst="rect">
+            <a:avLst/>
+          </a:prstGeom>
+          <a:noFill/>
+        </p:spPr>
+        <p:txBody>
+          <a:bodyPr wrap="square" lIns="25400" rIns="25400" tIns="25400" bIns="25400">
+            <a:spAutoFit/>
+          </a:bodyPr>
+          <a:lstStyle/>
+          <a:p>
+            <a:pPr algn="l">
+              <a:spcBef>
+                <a:spcPts val="0"/>
+              </a:spcBef>
+              <a:spcAft>
+                <a:spcPts val="600"/>
+              </a:spcAft>
+            </a:pPr>
+            <a:r>
+              <a:rPr sz="1500" b="1" i="0">
+                <a:solidFill>
+                  <a:srgbClr val="065A82"/>
+                </a:solidFill>
+                <a:latin typeface="Consolas"/>
+              </a:rPr>
+              <a:t>utils/testar_algoritmos.py</a:t>
+            </a:r>
+          </a:p>
+        </p:txBody>
+      </p:sp>
+      <p:sp>
+        <p:nvSpPr>
+          <p:cNvPr id="18" name="TextBox 17"/>
+          <p:cNvSpPr txBox="1"/>
+          <p:nvPr/>
+        </p:nvSpPr>
+        <p:spPr>
+          <a:xfrm>
+            <a:off x="5029200" y="5678424"/>
+            <a:ext cx="6309360" cy="548640"/>
+          </a:xfrm>
+          <a:prstGeom prst="rect">
+            <a:avLst/>
+          </a:prstGeom>
+          <a:noFill/>
+        </p:spPr>
+        <p:txBody>
+          <a:bodyPr wrap="square" lIns="25400" rIns="25400" tIns="25400" bIns="25400">
+            <a:spAutoFit/>
+          </a:bodyPr>
+          <a:lstStyle/>
+          <a:p>
+            <a:pPr algn="l">
+              <a:spcBef>
+                <a:spcPts val="0"/>
+              </a:spcBef>
+              <a:spcAft>
+                <a:spcPts val="600"/>
+              </a:spcAft>
+            </a:pPr>
+            <a:r>
+              <a:rPr sz="1400" b="0" i="0">
+                <a:solidFill>
+                  <a:srgbClr val="222A33"/>
+                </a:solidFill>
+                <a:latin typeface="Calibri"/>
+              </a:rPr>
+              <a:t>Suíte de 9 testes sintéticos em malha fechada</a:t>
+            </a:r>
+          </a:p>
+        </p:txBody>
+      </p:sp>
+    </p:spTree>
+  </p:cSld>
+  <p:clrMapOvr>
+    <a:masterClrMapping/>
+  </p:clrMapOvr>
+</p:sld>
+</file>
+
+<file path=ppt/slides/slide13.xml><?xml version="1.0" encoding="utf-8"?>
+<p:sld xmlns:a="http://schemas.openxmlformats.org/drawingml/2006/main" xmlns:p="http://schemas.openxmlformats.org/presentationml/2006/main" xmlns:r="http://schemas.openxmlformats.org/officeDocument/2006/relationships">
+  <p:cSld>
+    <p:spTree>
+      <p:nvGrpSpPr>
+        <p:cNvPr id="1" name=""/>
+        <p:cNvGrpSpPr/>
+        <p:nvPr/>
+      </p:nvGrpSpPr>
+      <p:grpSpPr/>
+      <p:sp>
+        <p:nvSpPr>
+          <p:cNvPr id="2" name="Rectangle 1"/>
+          <p:cNvSpPr/>
+          <p:nvPr/>
+        </p:nvSpPr>
+        <p:spPr>
+          <a:xfrm>
+            <a:off x="0" y="0"/>
+            <a:ext cx="12191695" cy="6858000"/>
+          </a:xfrm>
+          <a:prstGeom prst="rect">
+            <a:avLst/>
+          </a:prstGeom>
+          <a:solidFill>
+            <a:srgbClr val="FFFFFF"/>
+          </a:solidFill>
+          <a:ln>
+            <a:noFill/>
+          </a:ln>
+          <a:effectLst/>
+        </p:spPr>
+        <p:style>
+          <a:lnRef idx="1">
+            <a:schemeClr val="accent1"/>
+          </a:lnRef>
+          <a:fillRef idx="3">
+            <a:schemeClr val="accent1"/>
+          </a:fillRef>
+          <a:effectRef idx="2">
+            <a:schemeClr val="accent1"/>
+          </a:effectRef>
+          <a:fontRef idx="minor">
+            <a:schemeClr val="lt1"/>
+          </a:fontRef>
+        </p:style>
+        <p:txBody>
+          <a:bodyPr rtlCol="0" anchor="ctr"/>
+          <a:lstStyle/>
+          <a:p>
+            <a:pPr algn="ctr"/>
+          </a:p>
+        </p:txBody>
+      </p:sp>
+      <p:sp>
+        <p:nvSpPr>
+          <p:cNvPr id="3" name="TextBox 2"/>
+          <p:cNvSpPr txBox="1"/>
+          <p:nvPr/>
+        </p:nvSpPr>
+        <p:spPr>
+          <a:xfrm>
+            <a:off x="548640" y="411480"/>
+            <a:ext cx="11064240" cy="1188720"/>
+          </a:xfrm>
+          <a:prstGeom prst="rect">
+            <a:avLst/>
+          </a:prstGeom>
+          <a:noFill/>
+        </p:spPr>
+        <p:txBody>
+          <a:bodyPr wrap="square" lIns="25400" rIns="25400" tIns="25400" bIns="25400">
+            <a:spAutoFit/>
+          </a:bodyPr>
+          <a:lstStyle/>
+          <a:p>
+            <a:pPr algn="l">
+              <a:spcBef>
+                <a:spcPts val="0"/>
+              </a:spcBef>
+              <a:spcAft>
+                <a:spcPts val="200"/>
+              </a:spcAft>
+            </a:pPr>
+            <a:r>
+              <a:rPr sz="1300" b="1" i="0">
+                <a:solidFill>
+                  <a:srgbClr val="02C39A"/>
+                </a:solidFill>
+                <a:latin typeface="Calibri"/>
+              </a:rPr>
+              <a:t>RESULTADOS</a:t>
+            </a:r>
+          </a:p>
+          <a:p>
+            <a:pPr algn="l">
+              <a:spcBef>
+                <a:spcPts val="0"/>
+              </a:spcBef>
+              <a:spcAft>
+                <a:spcPts val="0"/>
+              </a:spcAft>
+            </a:pPr>
+            <a:r>
+              <a:rPr sz="3200" b="1" i="0">
+                <a:solidFill>
+                  <a:srgbClr val="222A33"/>
+                </a:solidFill>
+                <a:latin typeface="Cambria"/>
+              </a:rPr>
+              <a:t>Validação em malha fechada</a:t>
+            </a:r>
+          </a:p>
+        </p:txBody>
+      </p:sp>
+      <p:sp>
+        <p:nvSpPr>
+          <p:cNvPr id="4" name="Rounded Rectangle 3"/>
+          <p:cNvSpPr/>
+          <p:nvPr/>
+        </p:nvSpPr>
+        <p:spPr>
+          <a:xfrm>
+            <a:off x="640080" y="1965960"/>
+            <a:ext cx="3538728" cy="1920240"/>
+          </a:xfrm>
+          <a:prstGeom prst="roundRect">
+            <a:avLst/>
+          </a:prstGeom>
+          <a:solidFill>
             <a:srgbClr val="1B2A4A"/>
           </a:solidFill>
           <a:ln>
@@ -4728,14 +5104,14 @@
       </p:sp>
       <p:sp>
         <p:nvSpPr>
-          <p:cNvPr id="3" name="TextBox 2"/>
+          <p:cNvPr id="5" name="TextBox 4"/>
           <p:cNvSpPr txBox="1"/>
           <p:nvPr/>
         </p:nvSpPr>
         <p:spPr>
           <a:xfrm>
-            <a:off x="822960" y="1097280"/>
-            <a:ext cx="10515600" cy="1097280"/>
+            <a:off x="822959" y="2148840"/>
+            <a:ext cx="3172968" cy="1554480"/>
           </a:xfrm>
           <a:prstGeom prst="rect">
             <a:avLst/>
@@ -4748,36 +5124,100 @@
           </a:bodyPr>
           <a:lstStyle/>
           <a:p>
-            <a:pPr algn="l">
-              <a:spcBef>
-                <a:spcPts val="0"/>
-              </a:spcBef>
-              <a:spcAft>
-                <a:spcPts val="600"/>
-              </a:spcAft>
-            </a:pPr>
-            <a:r>
-              <a:rPr sz="1500" b="1" i="0">
+            <a:pPr algn="ctr">
+              <a:spcBef>
+                <a:spcPts val="0"/>
+              </a:spcBef>
+              <a:spcAft>
+                <a:spcPts val="200"/>
+              </a:spcAft>
+            </a:pPr>
+            <a:r>
+              <a:rPr sz="4000" b="1" i="0">
                 <a:solidFill>
                   <a:srgbClr val="02C39A"/>
                 </a:solidFill>
+                <a:latin typeface="Cambria"/>
+              </a:rPr>
+              <a:t>9/9</a:t>
+            </a:r>
+          </a:p>
+          <a:p>
+            <a:pPr algn="ctr">
+              <a:spcBef>
+                <a:spcPts val="0"/>
+              </a:spcBef>
+              <a:spcAft>
+                <a:spcPts val="0"/>
+              </a:spcAft>
+            </a:pPr>
+            <a:r>
+              <a:rPr sz="1400" b="0" i="0">
+                <a:solidFill>
+                  <a:srgbClr val="FFFFFF"/>
+                </a:solidFill>
                 <a:latin typeface="Calibri"/>
               </a:rPr>
-              <a:t>CONCLUSÃO</a:t>
-            </a:r>
-          </a:p>
-        </p:txBody>
-      </p:sp>
-      <p:sp>
-        <p:nvSpPr>
-          <p:cNvPr id="4" name="TextBox 3"/>
+              <a:t>testes sintéticos
+aprovados</a:t>
+            </a:r>
+          </a:p>
+        </p:txBody>
+      </p:sp>
+      <p:sp>
+        <p:nvSpPr>
+          <p:cNvPr id="6" name="Rounded Rectangle 5"/>
+          <p:cNvSpPr/>
+          <p:nvPr/>
+        </p:nvSpPr>
+        <p:spPr>
+          <a:xfrm>
+            <a:off x="4361688" y="1965960"/>
+            <a:ext cx="3538728" cy="1920240"/>
+          </a:xfrm>
+          <a:prstGeom prst="roundRect">
+            <a:avLst/>
+          </a:prstGeom>
+          <a:solidFill>
+            <a:srgbClr val="1B2A4A"/>
+          </a:solidFill>
+          <a:ln>
+            <a:noFill/>
+          </a:ln>
+          <a:effectLst/>
+        </p:spPr>
+        <p:style>
+          <a:lnRef idx="1">
+            <a:schemeClr val="accent1"/>
+          </a:lnRef>
+          <a:fillRef idx="3">
+            <a:schemeClr val="accent1"/>
+          </a:fillRef>
+          <a:effectRef idx="2">
+            <a:schemeClr val="accent1"/>
+          </a:effectRef>
+          <a:fontRef idx="minor">
+            <a:schemeClr val="lt1"/>
+          </a:fontRef>
+        </p:style>
+        <p:txBody>
+          <a:bodyPr rtlCol="0" anchor="ctr"/>
+          <a:lstStyle/>
+          <a:p>
+            <a:pPr algn="ctr"/>
+          </a:p>
+        </p:txBody>
+      </p:sp>
+      <p:sp>
+        <p:nvSpPr>
+          <p:cNvPr id="7" name="TextBox 6"/>
           <p:cNvSpPr txBox="1"/>
           <p:nvPr/>
         </p:nvSpPr>
         <p:spPr>
           <a:xfrm>
-            <a:off x="822960" y="1828800"/>
-            <a:ext cx="10515600" cy="2926080"/>
+            <a:off x="4544568" y="2148840"/>
+            <a:ext cx="3172968" cy="1554480"/>
           </a:xfrm>
           <a:prstGeom prst="rect">
             <a:avLst/>
@@ -4789,6 +5229,396 @@
             <a:spAutoFit/>
           </a:bodyPr>
           <a:lstStyle/>
+          <a:p>
+            <a:pPr algn="ctr">
+              <a:spcBef>
+                <a:spcPts val="0"/>
+              </a:spcBef>
+              <a:spcAft>
+                <a:spcPts val="200"/>
+              </a:spcAft>
+            </a:pPr>
+            <a:r>
+              <a:rPr sz="4000" b="1" i="0">
+                <a:solidFill>
+                  <a:srgbClr val="02C39A"/>
+                </a:solidFill>
+                <a:latin typeface="Cambria"/>
+              </a:rPr>
+              <a:t>0,35 m</a:t>
+            </a:r>
+          </a:p>
+          <a:p>
+            <a:pPr algn="ctr">
+              <a:spcBef>
+                <a:spcPts val="0"/>
+              </a:spcBef>
+              <a:spcAft>
+                <a:spcPts val="0"/>
+              </a:spcAft>
+            </a:pPr>
+            <a:r>
+              <a:rPr sz="1400" b="0" i="0">
+                <a:solidFill>
+                  <a:srgbClr val="FFFFFF"/>
+                </a:solidFill>
+                <a:latin typeface="Calibri"/>
+              </a:rPr>
+              <a:t>menor corredor
+transponível</a:t>
+            </a:r>
+          </a:p>
+        </p:txBody>
+      </p:sp>
+      <p:sp>
+        <p:nvSpPr>
+          <p:cNvPr id="8" name="Rounded Rectangle 7"/>
+          <p:cNvSpPr/>
+          <p:nvPr/>
+        </p:nvSpPr>
+        <p:spPr>
+          <a:xfrm>
+            <a:off x="8083296" y="1965960"/>
+            <a:ext cx="3538728" cy="1920240"/>
+          </a:xfrm>
+          <a:prstGeom prst="roundRect">
+            <a:avLst/>
+          </a:prstGeom>
+          <a:solidFill>
+            <a:srgbClr val="1B2A4A"/>
+          </a:solidFill>
+          <a:ln>
+            <a:noFill/>
+          </a:ln>
+          <a:effectLst/>
+        </p:spPr>
+        <p:style>
+          <a:lnRef idx="1">
+            <a:schemeClr val="accent1"/>
+          </a:lnRef>
+          <a:fillRef idx="3">
+            <a:schemeClr val="accent1"/>
+          </a:fillRef>
+          <a:effectRef idx="2">
+            <a:schemeClr val="accent1"/>
+          </a:effectRef>
+          <a:fontRef idx="minor">
+            <a:schemeClr val="lt1"/>
+          </a:fontRef>
+        </p:style>
+        <p:txBody>
+          <a:bodyPr rtlCol="0" anchor="ctr"/>
+          <a:lstStyle/>
+          <a:p>
+            <a:pPr algn="ctr"/>
+          </a:p>
+        </p:txBody>
+      </p:sp>
+      <p:sp>
+        <p:nvSpPr>
+          <p:cNvPr id="9" name="TextBox 8"/>
+          <p:cNvSpPr txBox="1"/>
+          <p:nvPr/>
+        </p:nvSpPr>
+        <p:spPr>
+          <a:xfrm>
+            <a:off x="8266175" y="2148840"/>
+            <a:ext cx="3172968" cy="1554480"/>
+          </a:xfrm>
+          <a:prstGeom prst="rect">
+            <a:avLst/>
+          </a:prstGeom>
+          <a:noFill/>
+        </p:spPr>
+        <p:txBody>
+          <a:bodyPr wrap="square" lIns="25400" rIns="25400" tIns="25400" bIns="25400">
+            <a:spAutoFit/>
+          </a:bodyPr>
+          <a:lstStyle/>
+          <a:p>
+            <a:pPr algn="ctr">
+              <a:spcBef>
+                <a:spcPts val="0"/>
+              </a:spcBef>
+              <a:spcAft>
+                <a:spcPts val="200"/>
+              </a:spcAft>
+            </a:pPr>
+            <a:r>
+              <a:rPr sz="4000" b="1" i="0">
+                <a:solidFill>
+                  <a:srgbClr val="02C39A"/>
+                </a:solidFill>
+                <a:latin typeface="Cambria"/>
+              </a:rPr>
+              <a:t>129 → 9</a:t>
+            </a:r>
+          </a:p>
+          <a:p>
+            <a:pPr algn="ctr">
+              <a:spcBef>
+                <a:spcPts val="0"/>
+              </a:spcBef>
+              <a:spcAft>
+                <a:spcPts val="0"/>
+              </a:spcAft>
+            </a:pPr>
+            <a:r>
+              <a:rPr sz="1400" b="0" i="0">
+                <a:solidFill>
+                  <a:srgbClr val="FFFFFF"/>
+                </a:solidFill>
+                <a:latin typeface="Calibri"/>
+              </a:rPr>
+              <a:t>nós reduzidos a
+pontos-chave</a:t>
+            </a:r>
+          </a:p>
+        </p:txBody>
+      </p:sp>
+      <p:sp>
+        <p:nvSpPr>
+          <p:cNvPr id="10" name="TextBox 9"/>
+          <p:cNvSpPr txBox="1"/>
+          <p:nvPr/>
+        </p:nvSpPr>
+        <p:spPr>
+          <a:xfrm>
+            <a:off x="640080" y="4206240"/>
+            <a:ext cx="10881360" cy="2286000"/>
+          </a:xfrm>
+          <a:prstGeom prst="rect">
+            <a:avLst/>
+          </a:prstGeom>
+          <a:noFill/>
+        </p:spPr>
+        <p:txBody>
+          <a:bodyPr wrap="square" lIns="25400" rIns="25400" tIns="25400" bIns="25400">
+            <a:spAutoFit/>
+          </a:bodyPr>
+          <a:lstStyle/>
+          <a:p>
+            <a:pPr algn="l">
+              <a:spcBef>
+                <a:spcPts val="0"/>
+              </a:spcBef>
+              <a:spcAft>
+                <a:spcPts val="800"/>
+              </a:spcAft>
+            </a:pPr>
+            <a:r>
+              <a:rPr sz="1700" b="1" i="0">
+                <a:solidFill>
+                  <a:srgbClr val="065A82"/>
+                </a:solidFill>
+                <a:latin typeface="Calibri"/>
+              </a:rPr>
+              <a:t>Casos aprovados (utils/testar_algoritmos.py):</a:t>
+            </a:r>
+          </a:p>
+          <a:p>
+            <a:pPr algn="l">
+              <a:spcBef>
+                <a:spcPts val="0"/>
+              </a:spcBef>
+              <a:spcAft>
+                <a:spcPts val="700"/>
+              </a:spcAft>
+            </a:pPr>
+            <a:r>
+              <a:rPr sz="1500" b="0" i="0">
+                <a:solidFill>
+                  <a:srgbClr val="222A33"/>
+                </a:solidFill>
+                <a:latin typeface="Calibri"/>
+              </a:rPr>
+              <a:t>•  Corredores de 0,60 / 0,50 / 0,40 / 0,35 m — sem colisão, folga ≥ 0,20 m</a:t>
+            </a:r>
+          </a:p>
+          <a:p>
+            <a:pPr algn="l">
+              <a:spcBef>
+                <a:spcPts val="0"/>
+              </a:spcBef>
+              <a:spcAft>
+                <a:spcPts val="700"/>
+              </a:spcAft>
+            </a:pPr>
+            <a:r>
+              <a:rPr sz="1500" b="0" i="0">
+                <a:solidFill>
+                  <a:srgbClr val="222A33"/>
+                </a:solidFill>
+                <a:latin typeface="Calibri"/>
+              </a:rPr>
+              <a:t>•  Obstáculo em L, goal a 15 cm da parede, início virado 180°</a:t>
+            </a:r>
+          </a:p>
+          <a:p>
+            <a:pPr algn="l">
+              <a:spcBef>
+                <a:spcPts val="0"/>
+              </a:spcBef>
+              <a:spcAft>
+                <a:spcPts val="700"/>
+              </a:spcAft>
+            </a:pPr>
+            <a:r>
+              <a:rPr sz="1500" b="0" i="0">
+                <a:solidFill>
+                  <a:srgbClr val="222A33"/>
+                </a:solidFill>
+                <a:latin typeface="Calibri"/>
+              </a:rPr>
+              <a:t>•  Prefere corredor largo a vão apertado; usa o vão quando é a única opção</a:t>
+            </a:r>
+          </a:p>
+          <a:p>
+            <a:pPr algn="l">
+              <a:spcBef>
+                <a:spcPts val="0"/>
+              </a:spcBef>
+              <a:spcAft>
+                <a:spcPts val="700"/>
+              </a:spcAft>
+            </a:pPr>
+            <a:r>
+              <a:rPr sz="1500" b="0" i="0">
+                <a:solidFill>
+                  <a:srgbClr val="222A33"/>
+                </a:solidFill>
+                <a:latin typeface="Calibri"/>
+              </a:rPr>
+              <a:t>•  Navegação confirmada na cena oficial do CoppeliaSim (direção correta)</a:t>
+            </a:r>
+          </a:p>
+        </p:txBody>
+      </p:sp>
+    </p:spTree>
+  </p:cSld>
+  <p:clrMapOvr>
+    <a:masterClrMapping/>
+  </p:clrMapOvr>
+</p:sld>
+</file>
+
+<file path=ppt/slides/slide14.xml><?xml version="1.0" encoding="utf-8"?>
+<p:sld xmlns:a="http://schemas.openxmlformats.org/drawingml/2006/main" xmlns:p="http://schemas.openxmlformats.org/presentationml/2006/main" xmlns:r="http://schemas.openxmlformats.org/officeDocument/2006/relationships">
+  <p:cSld>
+    <p:spTree>
+      <p:nvGrpSpPr>
+        <p:cNvPr id="1" name=""/>
+        <p:cNvGrpSpPr/>
+        <p:nvPr/>
+      </p:nvGrpSpPr>
+      <p:grpSpPr/>
+      <p:sp>
+        <p:nvSpPr>
+          <p:cNvPr id="2" name="Rectangle 1"/>
+          <p:cNvSpPr/>
+          <p:nvPr/>
+        </p:nvSpPr>
+        <p:spPr>
+          <a:xfrm>
+            <a:off x="0" y="0"/>
+            <a:ext cx="12191695" cy="6858000"/>
+          </a:xfrm>
+          <a:prstGeom prst="rect">
+            <a:avLst/>
+          </a:prstGeom>
+          <a:solidFill>
+            <a:srgbClr val="1B2A4A"/>
+          </a:solidFill>
+          <a:ln>
+            <a:noFill/>
+          </a:ln>
+          <a:effectLst/>
+        </p:spPr>
+        <p:style>
+          <a:lnRef idx="1">
+            <a:schemeClr val="accent1"/>
+          </a:lnRef>
+          <a:fillRef idx="3">
+            <a:schemeClr val="accent1"/>
+          </a:fillRef>
+          <a:effectRef idx="2">
+            <a:schemeClr val="accent1"/>
+          </a:effectRef>
+          <a:fontRef idx="minor">
+            <a:schemeClr val="lt1"/>
+          </a:fontRef>
+        </p:style>
+        <p:txBody>
+          <a:bodyPr rtlCol="0" anchor="ctr"/>
+          <a:lstStyle/>
+          <a:p>
+            <a:pPr algn="ctr"/>
+          </a:p>
+        </p:txBody>
+      </p:sp>
+      <p:sp>
+        <p:nvSpPr>
+          <p:cNvPr id="3" name="TextBox 2"/>
+          <p:cNvSpPr txBox="1"/>
+          <p:nvPr/>
+        </p:nvSpPr>
+        <p:spPr>
+          <a:xfrm>
+            <a:off x="822960" y="1097280"/>
+            <a:ext cx="10515600" cy="1097280"/>
+          </a:xfrm>
+          <a:prstGeom prst="rect">
+            <a:avLst/>
+          </a:prstGeom>
+          <a:noFill/>
+        </p:spPr>
+        <p:txBody>
+          <a:bodyPr wrap="square" lIns="25400" rIns="25400" tIns="25400" bIns="25400">
+            <a:spAutoFit/>
+          </a:bodyPr>
+          <a:lstStyle/>
+          <a:p>
+            <a:pPr algn="l">
+              <a:spcBef>
+                <a:spcPts val="0"/>
+              </a:spcBef>
+              <a:spcAft>
+                <a:spcPts val="600"/>
+              </a:spcAft>
+            </a:pPr>
+            <a:r>
+              <a:rPr sz="1500" b="1" i="0">
+                <a:solidFill>
+                  <a:srgbClr val="02C39A"/>
+                </a:solidFill>
+                <a:latin typeface="Calibri"/>
+              </a:rPr>
+              <a:t>CONCLUSÃO</a:t>
+            </a:r>
+          </a:p>
+        </p:txBody>
+      </p:sp>
+      <p:sp>
+        <p:nvSpPr>
+          <p:cNvPr id="4" name="TextBox 3"/>
+          <p:cNvSpPr txBox="1"/>
+          <p:nvPr/>
+        </p:nvSpPr>
+        <p:spPr>
+          <a:xfrm>
+            <a:off x="822960" y="1828800"/>
+            <a:ext cx="10515600" cy="2926080"/>
+          </a:xfrm>
+          <a:prstGeom prst="rect">
+            <a:avLst/>
+          </a:prstGeom>
+          <a:noFill/>
+        </p:spPr>
+        <p:txBody>
+          <a:bodyPr wrap="square" lIns="25400" rIns="25400" tIns="25400" bIns="25400">
+            <a:spAutoFit/>
+          </a:bodyPr>
+          <a:lstStyle/>
           <a:p/>
           <a:p>
             <a:pPr algn="l">
@@ -4825,7 +5655,7 @@
                 </a:solidFill>
                 <a:latin typeface="Calibri"/>
               </a:rPr>
-              <a:t>•  Defeito de sentido de marcha diagnosticado e corrigido de forma robusta.</a:t>
+              <a:t>•  Robusto em passagens apertadas: penalidade de proximidade, custo limitado, alvo visível e recuperação.</a:t>
             </a:r>
           </a:p>
           <a:p>
@@ -4844,7 +5674,26 @@
                 </a:solidFill>
                 <a:latin typeface="Calibri"/>
               </a:rPr>
-              <a:t>•  Projeto modularizado e documentado (relatório final + apresentação).</a:t>
+              <a:t>•  Mapa de ocupação + rota exibidos ao vivo a cada simulação (mapa_rota.png).</a:t>
+            </a:r>
+          </a:p>
+          <a:p>
+            <a:pPr algn="l">
+              <a:spcBef>
+                <a:spcPts val="0"/>
+              </a:spcBef>
+              <a:spcAft>
+                <a:spcPts val="1400"/>
+              </a:spcAft>
+            </a:pPr>
+            <a:r>
+              <a:rPr sz="1800" b="0" i="0">
+                <a:solidFill>
+                  <a:srgbClr val="FFFFFF"/>
+                </a:solidFill>
+                <a:latin typeface="Calibri"/>
+              </a:rPr>
+              <a:t>•  Validação: 9/9 testes sintéticos em malha fechada + navegação confirmada no CoppeliaSim.</a:t>
             </a:r>
           </a:p>
         </p:txBody>
